--- a/Y9_Exploring_Science/9C_Threat_from_disease/9C_L02_Immunity_and_vaccination.pptx
+++ b/Y9_Exploring_Science/9C_Threat_from_disease/9C_L02_Immunity_and_vaccination.pptx
@@ -1740,7 +1740,7 @@
         <p:spPr>
           <a:xfrm>
             <a:off x="548640" y="3657600"/>
-            <a:ext cx="10515600" cy="914400"/>
+            <a:ext cx="10515600" cy="1097280"/>
           </a:xfrm>
           <a:prstGeom prst="rect">
             <a:avLst/>
@@ -1753,7 +1753,7 @@
           <a:lstStyle>
             <a:lvl1pPr indent="0" marL="0">
               <a:buNone/>
-              <a:defRPr lang="en-US" sz="2000" dirty="0">
+              <a:defRPr lang="en-US" sz="2400" dirty="0">
                 <a:solidFill>
                   <a:srgbClr val="FFFFFF"/>
                 </a:solidFill>
@@ -1764,7 +1764,7 @@
             <a:pPr indent="0" marL="0">
               <a:buNone/>
             </a:pPr>
-            <a:endParaRPr lang="en-US" sz="2000" dirty="0"/>
+            <a:endParaRPr lang="en-US" sz="2400" dirty="0"/>
           </a:p>
         </p:txBody>
       </p:sp>
@@ -1864,14 +1864,14 @@
               <a:buNone/>
             </a:pPr>
             <a:r>
-              <a:rPr lang="en-US" sz="900" dirty="0">
+              <a:rPr lang="en-US" sz="1000" dirty="0">
                 <a:solidFill>
                   <a:srgbClr val="5B6574"/>
                 </a:solidFill>
               </a:rPr>
               <a:t>Year 9 Science  |  9C Threat from disease  |  Lesson 2: Immunity and vaccination</a:t>
             </a:r>
-            <a:endParaRPr lang="en-US" sz="900" dirty="0"/>
+            <a:endParaRPr lang="en-US" sz="1000" dirty="0"/>
           </a:p>
         </p:txBody>
       </p:sp>
@@ -2040,14 +2040,14 @@
               <a:buNone/>
             </a:pPr>
             <a:r>
-              <a:rPr lang="en-US" sz="900" dirty="0">
+              <a:rPr lang="en-US" sz="1000" dirty="0">
                 <a:solidFill>
                   <a:srgbClr val="5B6574"/>
                 </a:solidFill>
               </a:rPr>
               <a:t>Year 9 Science  |  9C Threat from disease  |  Lesson 2: Immunity and vaccination</a:t>
             </a:r>
-            <a:endParaRPr lang="en-US" sz="900" dirty="0"/>
+            <a:endParaRPr lang="en-US" sz="1000" dirty="0"/>
           </a:p>
         </p:txBody>
       </p:sp>
@@ -2216,14 +2216,14 @@
               <a:buNone/>
             </a:pPr>
             <a:r>
-              <a:rPr lang="en-US" sz="900" dirty="0">
+              <a:rPr lang="en-US" sz="1000" dirty="0">
                 <a:solidFill>
                   <a:srgbClr val="5B6574"/>
                 </a:solidFill>
               </a:rPr>
               <a:t>Year 9 Science  |  9C Threat from disease  |  Lesson 2: Immunity and vaccination</a:t>
             </a:r>
-            <a:endParaRPr lang="en-US" sz="900" dirty="0"/>
+            <a:endParaRPr lang="en-US" sz="1000" dirty="0"/>
           </a:p>
         </p:txBody>
       </p:sp>
@@ -2352,7 +2352,7 @@
           <a:lstStyle>
             <a:lvl1pPr indent="0" marL="0">
               <a:buNone/>
-              <a:defRPr lang="en-US" sz="3000" b="1" dirty="0">
+              <a:defRPr lang="en-US" sz="3400" b="1" dirty="0">
                 <a:solidFill>
                   <a:srgbClr val="3A2E00"/>
                 </a:solidFill>
@@ -2363,7 +2363,7 @@
             <a:pPr indent="0" marL="0">
               <a:buNone/>
             </a:pPr>
-            <a:endParaRPr lang="en-US" sz="3000" dirty="0"/>
+            <a:endParaRPr lang="en-US" sz="3400" dirty="0"/>
           </a:p>
         </p:txBody>
       </p:sp>
@@ -2780,14 +2780,14 @@
               <a:buNone/>
             </a:pPr>
             <a:r>
-              <a:rPr lang="en-US" sz="1300" b="1" spc="200" kern="0" dirty="0">
+              <a:rPr lang="en-US" sz="1400" b="1" spc="200" kern="0" dirty="0">
                 <a:solidFill>
                   <a:srgbClr val="F2CE3E"/>
                 </a:solidFill>
               </a:rPr>
               <a:t>YEAR 9 SCIENCE  ·  9C THREAT FROM DISEASE  ·  LESSON 2 OF 7</a:t>
             </a:r>
-            <a:endParaRPr lang="en-US" sz="1300" dirty="0"/>
+            <a:endParaRPr lang="en-US" sz="1400" dirty="0"/>
           </a:p>
         </p:txBody>
       </p:sp>
@@ -2840,7 +2840,7 @@
         <p:spPr>
           <a:xfrm>
             <a:off x="548640" y="3657600"/>
-            <a:ext cx="10515600" cy="914400"/>
+            <a:ext cx="10515600" cy="1097280"/>
           </a:xfrm>
           <a:prstGeom prst="rect">
             <a:avLst/>
@@ -2856,14 +2856,14 @@
               <a:buNone/>
             </a:pPr>
             <a:r>
-              <a:rPr lang="en-US" sz="2000" dirty="0">
+              <a:rPr lang="en-US" sz="2400" dirty="0">
                 <a:solidFill>
                   <a:srgbClr val="FFFFFF"/>
                 </a:solidFill>
               </a:rPr>
               <a:t>How does your body beat a pathogen, and how can a vaccine make you immune without the disease?</a:t>
             </a:r>
-            <a:endParaRPr lang="en-US" sz="2000" dirty="0"/>
+            <a:endParaRPr lang="en-US" sz="2400" dirty="0"/>
           </a:p>
         </p:txBody>
       </p:sp>
@@ -2892,14 +2892,14 @@
               <a:buNone/>
             </a:pPr>
             <a:r>
-              <a:rPr lang="en-US" sz="1200" dirty="0">
+              <a:rPr lang="en-US" sz="1400" dirty="0">
                 <a:solidFill>
                   <a:srgbClr val="C9D3E6"/>
                 </a:solidFill>
               </a:rPr>
               <a:t>Exploring Science International 9  ·  Student Book pages 39 to 41  ·  Workbook pages 29 to 30</a:t>
             </a:r>
-            <a:endParaRPr lang="en-US" sz="1200" dirty="0"/>
+            <a:endParaRPr lang="en-US" sz="1400" dirty="0"/>
           </a:p>
         </p:txBody>
       </p:sp>
@@ -3207,23 +3207,21 @@
           <a:ln/>
         </p:spPr>
         <p:txBody>
-          <a:bodyPr wrap="square" lIns="0" tIns="0" rIns="0" bIns="0" rtlCol="0" anchor="t">
-            <a:normAutofit/>
-          </a:bodyPr>
+          <a:bodyPr wrap="square" lIns="0" tIns="0" rIns="0" bIns="0" rtlCol="0" anchor="t"/>
           <a:lstStyle/>
           <a:p>
             <a:pPr indent="0" marL="0">
               <a:buNone/>
             </a:pPr>
             <a:r>
-              <a:rPr lang="en-US" sz="1700" dirty="0">
+              <a:rPr lang="en-US" sz="2000" dirty="0">
                 <a:solidFill>
                   <a:srgbClr val="141B26"/>
                 </a:solidFill>
               </a:rPr>
               <a:t>Core: complete the gap fill with the word bank, match the key words, then decide true or false.</a:t>
             </a:r>
-            <a:endParaRPr lang="en-US" sz="1700" dirty="0"/>
+            <a:endParaRPr lang="en-US" sz="2000" dirty="0"/>
           </a:p>
         </p:txBody>
       </p:sp>
@@ -3306,23 +3304,21 @@
           <a:ln/>
         </p:spPr>
         <p:txBody>
-          <a:bodyPr wrap="square" lIns="0" tIns="0" rIns="0" bIns="0" rtlCol="0" anchor="t">
-            <a:normAutofit/>
-          </a:bodyPr>
+          <a:bodyPr wrap="square" lIns="0" tIns="0" rIns="0" bIns="0" rtlCol="0" anchor="t"/>
           <a:lstStyle/>
           <a:p>
             <a:pPr indent="0" marL="0">
               <a:buNone/>
             </a:pPr>
             <a:r>
-              <a:rPr lang="en-US" sz="1700" dirty="0">
+              <a:rPr lang="en-US" sz="2000" dirty="0">
                 <a:solidFill>
                   <a:srgbClr val="141B26"/>
                 </a:solidFill>
               </a:rPr>
               <a:t>Stretch: measles and chickenpox; how a vaccine protects a child; why viruses are not living.</a:t>
             </a:r>
-            <a:endParaRPr lang="en-US" sz="1700" dirty="0"/>
+            <a:endParaRPr lang="en-US" sz="2000" dirty="0"/>
           </a:p>
         </p:txBody>
       </p:sp>
@@ -3405,23 +3401,21 @@
           <a:ln/>
         </p:spPr>
         <p:txBody>
-          <a:bodyPr wrap="square" lIns="0" tIns="0" rIns="0" bIns="0" rtlCol="0" anchor="t">
-            <a:normAutofit/>
-          </a:bodyPr>
+          <a:bodyPr wrap="square" lIns="0" tIns="0" rIns="0" bIns="0" rtlCol="0" anchor="t"/>
           <a:lstStyle/>
           <a:p>
             <a:pPr indent="0" marL="0">
               <a:buNone/>
             </a:pPr>
             <a:r>
-              <a:rPr lang="en-US" sz="1700" dirty="0">
+              <a:rPr lang="en-US" sz="2000" dirty="0">
                 <a:solidFill>
                   <a:srgbClr val="141B26"/>
                 </a:solidFill>
               </a:rPr>
               <a:t>Challenge: a vet's antibiotic dose. Use the half-life to work out when the ball python needs its next dose.</a:t>
             </a:r>
-            <a:endParaRPr lang="en-US" sz="1700" dirty="0"/>
+            <a:endParaRPr lang="en-US" sz="2000" dirty="0"/>
           </a:p>
         </p:txBody>
       </p:sp>
@@ -3504,23 +3498,21 @@
           <a:ln/>
         </p:spPr>
         <p:txBody>
-          <a:bodyPr wrap="square" lIns="0" tIns="0" rIns="0" bIns="0" rtlCol="0" anchor="t">
-            <a:normAutofit/>
-          </a:bodyPr>
+          <a:bodyPr wrap="square" lIns="0" tIns="0" rIns="0" bIns="0" rtlCol="0" anchor="t"/>
           <a:lstStyle/>
           <a:p>
             <a:pPr indent="0" marL="0">
               <a:buNone/>
             </a:pPr>
             <a:r>
-              <a:rPr lang="en-US" sz="1700" dirty="0">
+              <a:rPr lang="en-US" sz="2000" dirty="0">
                 <a:solidFill>
                   <a:srgbClr val="141B26"/>
                 </a:solidFill>
               </a:rPr>
               <a:t>Finished? Answer the My thinking question about flu vaccines.</a:t>
             </a:r>
-            <a:endParaRPr lang="en-US" sz="1700" dirty="0"/>
+            <a:endParaRPr lang="en-US" sz="2000" dirty="0"/>
           </a:p>
         </p:txBody>
       </p:sp>
@@ -3549,14 +3541,14 @@
               <a:buNone/>
             </a:pPr>
             <a:r>
-              <a:rPr lang="en-US" sz="1300" i="1" dirty="0">
+              <a:rPr lang="en-US" sz="1500" i="1" dirty="0">
                 <a:solidFill>
                   <a:srgbClr val="5B6574"/>
                 </a:solidFill>
               </a:rPr>
               <a:t>Use the words phagocyte, lymphocyte, antibody and memory cell correctly: they are not the same thing.</a:t>
             </a:r>
-            <a:endParaRPr lang="en-US" sz="1300" dirty="0"/>
+            <a:endParaRPr lang="en-US" sz="1500" dirty="0"/>
           </a:p>
         </p:txBody>
       </p:sp>
@@ -3749,23 +3741,21 @@
           <a:ln/>
         </p:spPr>
         <p:txBody>
-          <a:bodyPr wrap="square" lIns="0" tIns="0" rIns="0" bIns="0" rtlCol="0" anchor="t">
-            <a:normAutofit/>
-          </a:bodyPr>
+          <a:bodyPr wrap="square" lIns="0" tIns="0" rIns="0" bIns="0" rtlCol="0" anchor="t"/>
           <a:lstStyle/>
           <a:p>
             <a:pPr indent="0" marL="0">
               <a:buNone/>
             </a:pPr>
             <a:r>
-              <a:rPr lang="en-US" sz="2200" b="1" dirty="0">
+              <a:rPr lang="en-US" sz="2600" b="1" dirty="0">
                 <a:solidFill>
                   <a:srgbClr val="0F2A5F"/>
                 </a:solidFill>
               </a:rPr>
               <a:t>In a town, 95% of children are vaccinated against measles. The other 5% cannot be: some are babies, some are too ill. Why are those 5% also protected?</a:t>
             </a:r>
-            <a:endParaRPr lang="en-US" sz="2200" dirty="0"/>
+            <a:endParaRPr lang="en-US" sz="2600" dirty="0"/>
           </a:p>
         </p:txBody>
       </p:sp>
@@ -3814,9 +3804,7 @@
           <a:ln/>
         </p:spPr>
         <p:txBody>
-          <a:bodyPr wrap="square" lIns="0" tIns="0" rIns="0" bIns="0" rtlCol="0" anchor="t">
-            <a:normAutofit/>
-          </a:bodyPr>
+          <a:bodyPr wrap="square" lIns="0" tIns="0" rIns="0" bIns="0" rtlCol="0" anchor="t"/>
           <a:lstStyle/>
           <a:p>
             <a:pPr indent="0" marL="0">
@@ -3826,14 +3814,14 @@
               <a:buNone/>
             </a:pPr>
             <a:r>
-              <a:rPr lang="en-US" sz="1500" b="1" dirty="0">
+              <a:rPr lang="en-US" sz="1800" b="1" dirty="0">
                 <a:solidFill>
                   <a:srgbClr val="7B3A8E"/>
                 </a:solidFill>
               </a:rPr>
               <a:t>Sentence frames</a:t>
             </a:r>
-            <a:endParaRPr lang="en-US" sz="1500" dirty="0"/>
+            <a:endParaRPr lang="en-US" sz="1800" dirty="0"/>
           </a:p>
           <a:p>
             <a:pPr indent="0" marL="0">
@@ -3843,14 +3831,14 @@
               <a:buNone/>
             </a:pPr>
             <a:r>
-              <a:rPr lang="en-US" sz="1500" dirty="0">
+              <a:rPr lang="en-US" sz="1800" dirty="0">
                 <a:solidFill>
                   <a:srgbClr val="141B26"/>
                 </a:solidFill>
               </a:rPr>
               <a:t>A pathogen spreads when ___.</a:t>
             </a:r>
-            <a:endParaRPr lang="en-US" sz="1500" dirty="0"/>
+            <a:endParaRPr lang="en-US" sz="1800" dirty="0"/>
           </a:p>
           <a:p>
             <a:pPr indent="0" marL="0">
@@ -3860,14 +3848,14 @@
               <a:buNone/>
             </a:pPr>
             <a:r>
-              <a:rPr lang="en-US" sz="1500" dirty="0">
+              <a:rPr lang="en-US" sz="1800" dirty="0">
                 <a:solidFill>
                   <a:srgbClr val="141B26"/>
                 </a:solidFill>
               </a:rPr>
               <a:t>Vaccinated people cannot ___, so the pathogen ___.</a:t>
             </a:r>
-            <a:endParaRPr lang="en-US" sz="1500" dirty="0"/>
+            <a:endParaRPr lang="en-US" sz="1800" dirty="0"/>
           </a:p>
           <a:p>
             <a:pPr indent="0" marL="0">
@@ -3877,14 +3865,14 @@
               <a:buNone/>
             </a:pPr>
             <a:r>
-              <a:rPr lang="en-US" sz="1500" dirty="0">
+              <a:rPr lang="en-US" sz="1800" dirty="0">
                 <a:solidFill>
                   <a:srgbClr val="141B26"/>
                 </a:solidFill>
               </a:rPr>
               <a:t>The unvaccinated 5% are protected because ___.</a:t>
             </a:r>
-            <a:endParaRPr lang="en-US" sz="1500" dirty="0"/>
+            <a:endParaRPr lang="en-US" sz="1800" dirty="0"/>
           </a:p>
         </p:txBody>
       </p:sp>
@@ -4084,14 +4072,14 @@
               <a:buNone/>
             </a:pPr>
             <a:r>
-              <a:rPr lang="en-US" sz="1400" i="1" dirty="0">
+              <a:rPr lang="en-US" sz="1600" i="1" dirty="0">
                 <a:solidFill>
                   <a:srgbClr val="5B6574"/>
                 </a:solidFill>
               </a:rPr>
               <a:t>On your worksheet exit ticket. Work alone. Hand it in as you leave.</a:t>
             </a:r>
-            <a:endParaRPr lang="en-US" sz="1400" dirty="0"/>
+            <a:endParaRPr lang="en-US" sz="1600" dirty="0"/>
           </a:p>
         </p:txBody>
       </p:sp>
@@ -4104,25 +4092,23 @@
         <p:spPr>
           <a:xfrm>
             <a:off x="548640" y="1828800"/>
-            <a:ext cx="10881360" cy="1188720"/>
-          </a:xfrm>
-          <a:prstGeom prst="rect">
-            <a:avLst/>
-          </a:prstGeom>
-          <a:noFill/>
-          <a:ln/>
-        </p:spPr>
-        <p:txBody>
-          <a:bodyPr wrap="square" lIns="0" tIns="0" rIns="0" bIns="0" rtlCol="0" anchor="t">
-            <a:normAutofit/>
-          </a:bodyPr>
+            <a:ext cx="9692640" cy="1188720"/>
+          </a:xfrm>
+          <a:prstGeom prst="rect">
+            <a:avLst/>
+          </a:prstGeom>
+          <a:noFill/>
+          <a:ln/>
+        </p:spPr>
+        <p:txBody>
+          <a:bodyPr wrap="square" lIns="0" tIns="0" rIns="0" bIns="0" rtlCol="0" anchor="t"/>
           <a:lstStyle/>
           <a:p>
             <a:pPr indent="0" marL="0">
               <a:buNone/>
             </a:pPr>
             <a:r>
-              <a:rPr lang="en-US" sz="1800" b="1" dirty="0">
+              <a:rPr lang="en-US" sz="2200" b="1" dirty="0">
                 <a:solidFill>
                   <a:srgbClr val="7B3A8E"/>
                 </a:solidFill>
@@ -4133,14 +4119,14 @@
               <a:buNone/>
             </a:pPr>
             <a:r>
-              <a:rPr lang="en-US" sz="1800" dirty="0">
+              <a:rPr lang="en-US" sz="2200" dirty="0">
                 <a:solidFill>
                   <a:srgbClr val="141B26"/>
                 </a:solidFill>
               </a:rPr>
               <a:t>Name the two types of white blood cell and say what each one does.</a:t>
             </a:r>
-            <a:endParaRPr lang="en-US" sz="1800" dirty="0"/>
+            <a:endParaRPr lang="en-US" sz="2200" dirty="0"/>
           </a:p>
         </p:txBody>
       </p:sp>
@@ -4153,25 +4139,23 @@
         <p:spPr>
           <a:xfrm>
             <a:off x="548640" y="3017520"/>
-            <a:ext cx="10881360" cy="1188720"/>
-          </a:xfrm>
-          <a:prstGeom prst="rect">
-            <a:avLst/>
-          </a:prstGeom>
-          <a:noFill/>
-          <a:ln/>
-        </p:spPr>
-        <p:txBody>
-          <a:bodyPr wrap="square" lIns="0" tIns="0" rIns="0" bIns="0" rtlCol="0" anchor="t">
-            <a:normAutofit/>
-          </a:bodyPr>
+            <a:ext cx="9692640" cy="1188720"/>
+          </a:xfrm>
+          <a:prstGeom prst="rect">
+            <a:avLst/>
+          </a:prstGeom>
+          <a:noFill/>
+          <a:ln/>
+        </p:spPr>
+        <p:txBody>
+          <a:bodyPr wrap="square" lIns="0" tIns="0" rIns="0" bIns="0" rtlCol="0" anchor="t"/>
           <a:lstStyle/>
           <a:p>
             <a:pPr indent="0" marL="0">
               <a:buNone/>
             </a:pPr>
             <a:r>
-              <a:rPr lang="en-US" sz="1800" b="1" dirty="0">
+              <a:rPr lang="en-US" sz="2200" b="1" dirty="0">
                 <a:solidFill>
                   <a:srgbClr val="7B3A8E"/>
                 </a:solidFill>
@@ -4182,14 +4166,14 @@
               <a:buNone/>
             </a:pPr>
             <a:r>
-              <a:rPr lang="en-US" sz="1800" dirty="0">
+              <a:rPr lang="en-US" sz="2200" dirty="0">
                 <a:solidFill>
                   <a:srgbClr val="141B26"/>
                 </a:solidFill>
               </a:rPr>
               <a:t>Why do you only get measles once?</a:t>
             </a:r>
-            <a:endParaRPr lang="en-US" sz="1800" dirty="0"/>
+            <a:endParaRPr lang="en-US" sz="2200" dirty="0"/>
           </a:p>
         </p:txBody>
       </p:sp>
@@ -4202,25 +4186,23 @@
         <p:spPr>
           <a:xfrm>
             <a:off x="548640" y="4206240"/>
-            <a:ext cx="10881360" cy="1188720"/>
-          </a:xfrm>
-          <a:prstGeom prst="rect">
-            <a:avLst/>
-          </a:prstGeom>
-          <a:noFill/>
-          <a:ln/>
-        </p:spPr>
-        <p:txBody>
-          <a:bodyPr wrap="square" lIns="0" tIns="0" rIns="0" bIns="0" rtlCol="0" anchor="t">
-            <a:normAutofit/>
-          </a:bodyPr>
+            <a:ext cx="9692640" cy="1188720"/>
+          </a:xfrm>
+          <a:prstGeom prst="rect">
+            <a:avLst/>
+          </a:prstGeom>
+          <a:noFill/>
+          <a:ln/>
+        </p:spPr>
+        <p:txBody>
+          <a:bodyPr wrap="square" lIns="0" tIns="0" rIns="0" bIns="0" rtlCol="0" anchor="t"/>
           <a:lstStyle/>
           <a:p>
             <a:pPr indent="0" marL="0">
               <a:buNone/>
             </a:pPr>
             <a:r>
-              <a:rPr lang="en-US" sz="1800" b="1" dirty="0">
+              <a:rPr lang="en-US" sz="2200" b="1" dirty="0">
                 <a:solidFill>
                   <a:srgbClr val="7B3A8E"/>
                 </a:solidFill>
@@ -4231,14 +4213,14 @@
               <a:buNone/>
             </a:pPr>
             <a:r>
-              <a:rPr lang="en-US" sz="1800" dirty="0">
+              <a:rPr lang="en-US" sz="2200" dirty="0">
                 <a:solidFill>
                   <a:srgbClr val="141B26"/>
                 </a:solidFill>
               </a:rPr>
               <a:t>What does a vaccine contain, and why does it not give you the disease?</a:t>
             </a:r>
-            <a:endParaRPr lang="en-US" sz="1800" dirty="0"/>
+            <a:endParaRPr lang="en-US" sz="2200" dirty="0"/>
           </a:p>
         </p:txBody>
       </p:sp>
@@ -4497,90 +4479,88 @@
         <p:spPr>
           <a:xfrm>
             <a:off x="548640" y="1371600"/>
-            <a:ext cx="10881360" cy="4480560"/>
-          </a:xfrm>
-          <a:prstGeom prst="rect">
-            <a:avLst/>
-          </a:prstGeom>
-          <a:noFill/>
-          <a:ln/>
-        </p:spPr>
-        <p:txBody>
-          <a:bodyPr wrap="square" lIns="0" tIns="0" rIns="0" bIns="0" rtlCol="0" anchor="t">
-            <a:normAutofit/>
-          </a:bodyPr>
+            <a:ext cx="10881360" cy="4114800"/>
+          </a:xfrm>
+          <a:prstGeom prst="rect">
+            <a:avLst/>
+          </a:prstGeom>
+          <a:noFill/>
+          <a:ln/>
+        </p:spPr>
+        <p:txBody>
+          <a:bodyPr wrap="square" lIns="0" tIns="0" rIns="0" bIns="0" rtlCol="0" anchor="t"/>
           <a:lstStyle/>
           <a:p>
             <a:pPr marL="342900" indent="-342900">
               <a:spcAft>
-                <a:spcPts val="1000"/>
+                <a:spcPts val="1200"/>
               </a:spcAft>
               <a:buSzPct val="100000"/>
               <a:buChar char="✓"/>
             </a:pPr>
             <a:r>
-              <a:rPr lang="en-US" sz="1700" dirty="0">
+              <a:rPr lang="en-US" sz="2000" dirty="0">
                 <a:solidFill>
                   <a:srgbClr val="141B26"/>
                 </a:solidFill>
               </a:rPr>
               <a:t>Phagocytes ingest and digest pathogens; lymphocytes make specific antibodies.</a:t>
             </a:r>
-            <a:endParaRPr lang="en-US" sz="1700" dirty="0"/>
+            <a:endParaRPr lang="en-US" sz="2000" dirty="0"/>
           </a:p>
           <a:p>
             <a:pPr marL="342900" indent="-342900">
               <a:spcAft>
-                <a:spcPts val="1000"/>
+                <a:spcPts val="1200"/>
               </a:spcAft>
               <a:buSzPct val="100000"/>
               <a:buChar char="✓"/>
             </a:pPr>
             <a:r>
-              <a:rPr lang="en-US" sz="1700" dirty="0">
+              <a:rPr lang="en-US" sz="2000" dirty="0">
                 <a:solidFill>
                   <a:srgbClr val="141B26"/>
                 </a:solidFill>
               </a:rPr>
               <a:t>Making antibodies for a new pathogen takes days, which is why you are ill before you get better.</a:t>
             </a:r>
-            <a:endParaRPr lang="en-US" sz="1700" dirty="0"/>
+            <a:endParaRPr lang="en-US" sz="2000" dirty="0"/>
           </a:p>
           <a:p>
             <a:pPr marL="342900" indent="-342900">
               <a:spcAft>
-                <a:spcPts val="1000"/>
+                <a:spcPts val="1200"/>
               </a:spcAft>
               <a:buSzPct val="100000"/>
               <a:buChar char="✓"/>
             </a:pPr>
             <a:r>
-              <a:rPr lang="en-US" sz="1700" dirty="0">
+              <a:rPr lang="en-US" sz="2000" dirty="0">
                 <a:solidFill>
                   <a:srgbClr val="141B26"/>
                 </a:solidFill>
               </a:rPr>
               <a:t>Memory cells make the second response fast and large: you are immune.</a:t>
             </a:r>
-            <a:endParaRPr lang="en-US" sz="1700" dirty="0"/>
+            <a:endParaRPr lang="en-US" sz="2000" dirty="0"/>
           </a:p>
           <a:p>
             <a:pPr marL="342900" indent="-342900">
               <a:spcAft>
-                <a:spcPts val="1000"/>
+                <a:spcPts val="1200"/>
               </a:spcAft>
               <a:buSzPct val="100000"/>
               <a:buChar char="✓"/>
             </a:pPr>
             <a:r>
-              <a:rPr lang="en-US" sz="1700" dirty="0">
+              <a:rPr lang="en-US" sz="2000" dirty="0">
                 <a:solidFill>
                   <a:srgbClr val="141B26"/>
                 </a:solidFill>
               </a:rPr>
               <a:t>Vaccines contain parts of a pathogen and make you immune without the disease; vaccinating most of a community protects everyone.</a:t>
             </a:r>
-            <a:endParaRPr lang="en-US" sz="1700" dirty="0"/>
+            <a:endParaRPr lang="en-US" sz="2000" dirty="0"/>
           </a:p>
         </p:txBody>
       </p:sp>
@@ -4895,94 +4875,92 @@
           <a:ln/>
         </p:spPr>
         <p:txBody>
-          <a:bodyPr wrap="square" lIns="0" tIns="0" rIns="0" bIns="0" rtlCol="0" anchor="t">
-            <a:normAutofit/>
-          </a:bodyPr>
+          <a:bodyPr wrap="square" lIns="0" tIns="0" rIns="0" bIns="0" rtlCol="0" anchor="t"/>
           <a:lstStyle/>
           <a:p>
             <a:pPr indent="0" marL="0">
               <a:spcAft>
-                <a:spcPts val="1000"/>
+                <a:spcPts val="1200"/>
               </a:spcAft>
               <a:buNone/>
             </a:pPr>
             <a:r>
-              <a:rPr lang="en-US" sz="2000" dirty="0">
+              <a:rPr lang="en-US" sz="2400" dirty="0">
                 <a:solidFill>
                   <a:srgbClr val="141B26"/>
                 </a:solidFill>
               </a:rPr>
               <a:t>Many people had chickenpox as a small child.</a:t>
             </a:r>
-            <a:endParaRPr lang="en-US" sz="2000" dirty="0"/>
+            <a:endParaRPr lang="en-US" sz="2400" dirty="0"/>
           </a:p>
           <a:p>
             <a:pPr indent="0" marL="0">
               <a:spcAft>
-                <a:spcPts val="1000"/>
+                <a:spcPts val="1200"/>
               </a:spcAft>
               <a:buNone/>
             </a:pPr>
             <a:r>
-              <a:rPr lang="en-US" sz="2000" dirty="0">
+              <a:rPr lang="en-US" sz="2400" dirty="0">
                 <a:solidFill>
                   <a:srgbClr val="141B26"/>
                 </a:solidFill>
               </a:rPr>
               <a:t>If a friend has it now, they will almost certainly not catch it again.</a:t>
             </a:r>
-            <a:endParaRPr lang="en-US" sz="2000" dirty="0"/>
+            <a:endParaRPr lang="en-US" sz="2400" dirty="0"/>
           </a:p>
           <a:p>
             <a:pPr indent="0" marL="0">
               <a:spcAft>
-                <a:spcPts val="1000"/>
+                <a:spcPts val="1200"/>
               </a:spcAft>
               <a:buNone/>
             </a:pPr>
             <a:r>
-              <a:rPr lang="en-US" sz="2000" dirty="0">
+              <a:rPr lang="en-US" sz="2400" dirty="0">
                 <a:solidFill>
                   <a:srgbClr val="141B26"/>
                 </a:solidFill>
               </a:rPr>
               <a:t>1. Suggest why you only get chickenpox once.</a:t>
             </a:r>
-            <a:endParaRPr lang="en-US" sz="2000" dirty="0"/>
+            <a:endParaRPr lang="en-US" sz="2400" dirty="0"/>
           </a:p>
           <a:p>
             <a:pPr indent="0" marL="0">
               <a:spcAft>
-                <a:spcPts val="1000"/>
+                <a:spcPts val="1200"/>
               </a:spcAft>
               <a:buNone/>
             </a:pPr>
             <a:r>
-              <a:rPr lang="en-US" sz="2000" dirty="0">
+              <a:rPr lang="en-US" sz="2400" dirty="0">
                 <a:solidFill>
                   <a:srgbClr val="141B26"/>
                 </a:solidFill>
               </a:rPr>
               <a:t>2. What is a pathogen? (last lesson)</a:t>
             </a:r>
-            <a:endParaRPr lang="en-US" sz="2000" dirty="0"/>
+            <a:endParaRPr lang="en-US" sz="2400" dirty="0"/>
           </a:p>
           <a:p>
             <a:pPr indent="0" marL="0">
               <a:spcAft>
-                <a:spcPts val="1000"/>
+                <a:spcPts val="1200"/>
               </a:spcAft>
               <a:buNone/>
             </a:pPr>
             <a:r>
-              <a:rPr lang="en-US" sz="2000" dirty="0">
+              <a:rPr lang="en-US" sz="2400" dirty="0">
                 <a:solidFill>
                   <a:srgbClr val="141B26"/>
                 </a:solidFill>
               </a:rPr>
               <a:t>3. Name two things your body does to fight an infection.</a:t>
             </a:r>
-            <a:endParaRPr lang="en-US" sz="2000" dirty="0"/>
+            <a:endParaRPr lang="en-US" sz="2400" dirty="0"/>
           </a:p>
         </p:txBody>
       </p:sp>
@@ -5165,8 +5143,8 @@
         </p:nvSpPr>
         <p:spPr>
           <a:xfrm>
-            <a:off x="548640" y="1325880"/>
-            <a:ext cx="5669280" cy="457200"/>
+            <a:off x="548640" y="1280160"/>
+            <a:ext cx="5486400" cy="411480"/>
           </a:xfrm>
           <a:prstGeom prst="rect">
             <a:avLst/>
@@ -5182,14 +5160,14 @@
               <a:buNone/>
             </a:pPr>
             <a:r>
-              <a:rPr lang="en-US" sz="2000" b="1" dirty="0">
+              <a:rPr lang="en-US" sz="2200" b="1" dirty="0">
                 <a:solidFill>
                   <a:srgbClr val="7B3A8E"/>
                 </a:solidFill>
               </a:rPr>
               <a:t>Today I can ...</a:t>
             </a:r>
-            <a:endParaRPr lang="en-US" sz="2000" dirty="0"/>
+            <a:endParaRPr lang="en-US" sz="2200" dirty="0"/>
           </a:p>
         </p:txBody>
       </p:sp>
@@ -5201,8 +5179,8 @@
         </p:nvSpPr>
         <p:spPr>
           <a:xfrm>
-            <a:off x="594360" y="1947672"/>
-            <a:ext cx="292608" cy="292608"/>
+            <a:off x="594360" y="1810512"/>
+            <a:ext cx="310896" cy="310896"/>
           </a:xfrm>
           <a:prstGeom prst="rect">
             <a:avLst/>
@@ -5226,33 +5204,31 @@
         </p:nvSpPr>
         <p:spPr>
           <a:xfrm>
-            <a:off x="1051560" y="1874520"/>
-            <a:ext cx="5120640" cy="868680"/>
-          </a:xfrm>
-          <a:prstGeom prst="rect">
-            <a:avLst/>
-          </a:prstGeom>
-          <a:noFill/>
-          <a:ln/>
-        </p:spPr>
-        <p:txBody>
-          <a:bodyPr wrap="square" lIns="0" tIns="0" rIns="0" bIns="0" rtlCol="0" anchor="t">
-            <a:normAutofit/>
-          </a:bodyPr>
+            <a:off x="1097280" y="1737360"/>
+            <a:ext cx="10332720" cy="868680"/>
+          </a:xfrm>
+          <a:prstGeom prst="rect">
+            <a:avLst/>
+          </a:prstGeom>
+          <a:noFill/>
+          <a:ln/>
+        </p:spPr>
+        <p:txBody>
+          <a:bodyPr wrap="square" lIns="0" tIns="0" rIns="0" bIns="0" rtlCol="0" anchor="t"/>
           <a:lstStyle/>
           <a:p>
             <a:pPr indent="0" marL="0">
               <a:buNone/>
             </a:pPr>
             <a:r>
-              <a:rPr lang="en-US" sz="1600" dirty="0">
+              <a:rPr lang="en-US" sz="2000" dirty="0">
                 <a:solidFill>
                   <a:srgbClr val="141B26"/>
                 </a:solidFill>
               </a:rPr>
               <a:t>I can describe how phagocytes and lymphocytes destroy microorganisms in the body.</a:t>
             </a:r>
-            <a:endParaRPr lang="en-US" sz="1600" dirty="0"/>
+            <a:endParaRPr lang="en-US" sz="2000" dirty="0"/>
           </a:p>
         </p:txBody>
       </p:sp>
@@ -5264,8 +5240,8 @@
         </p:nvSpPr>
         <p:spPr>
           <a:xfrm>
-            <a:off x="594360" y="2907792"/>
-            <a:ext cx="292608" cy="292608"/>
+            <a:off x="594360" y="2679192"/>
+            <a:ext cx="310896" cy="310896"/>
           </a:xfrm>
           <a:prstGeom prst="rect">
             <a:avLst/>
@@ -5289,33 +5265,31 @@
         </p:nvSpPr>
         <p:spPr>
           <a:xfrm>
-            <a:off x="1051560" y="2834640"/>
-            <a:ext cx="5120640" cy="868680"/>
-          </a:xfrm>
-          <a:prstGeom prst="rect">
-            <a:avLst/>
-          </a:prstGeom>
-          <a:noFill/>
-          <a:ln/>
-        </p:spPr>
-        <p:txBody>
-          <a:bodyPr wrap="square" lIns="0" tIns="0" rIns="0" bIns="0" rtlCol="0" anchor="t">
-            <a:normAutofit/>
-          </a:bodyPr>
+            <a:off x="1097280" y="2606040"/>
+            <a:ext cx="10332720" cy="868680"/>
+          </a:xfrm>
+          <a:prstGeom prst="rect">
+            <a:avLst/>
+          </a:prstGeom>
+          <a:noFill/>
+          <a:ln/>
+        </p:spPr>
+        <p:txBody>
+          <a:bodyPr wrap="square" lIns="0" tIns="0" rIns="0" bIns="0" rtlCol="0" anchor="t"/>
           <a:lstStyle/>
           <a:p>
             <a:pPr indent="0" marL="0">
               <a:buNone/>
             </a:pPr>
             <a:r>
-              <a:rPr lang="en-US" sz="1600" dirty="0">
+              <a:rPr lang="en-US" sz="2000" dirty="0">
                 <a:solidFill>
                   <a:srgbClr val="141B26"/>
                 </a:solidFill>
               </a:rPr>
               <a:t>I can explain why you only get many infectious diseases once, and how vaccination protects people and communities.</a:t>
             </a:r>
-            <a:endParaRPr lang="en-US" sz="1600" dirty="0"/>
+            <a:endParaRPr lang="en-US" sz="2000" dirty="0"/>
           </a:p>
         </p:txBody>
       </p:sp>
@@ -5327,8 +5301,8 @@
         </p:nvSpPr>
         <p:spPr>
           <a:xfrm>
-            <a:off x="6583680" y="1325880"/>
-            <a:ext cx="5029200" cy="457200"/>
+            <a:off x="548640" y="3611880"/>
+            <a:ext cx="5486400" cy="411480"/>
           </a:xfrm>
           <a:prstGeom prst="rect">
             <a:avLst/>
@@ -5344,14 +5318,14 @@
               <a:buNone/>
             </a:pPr>
             <a:r>
-              <a:rPr lang="en-US" sz="2000" b="1" dirty="0">
+              <a:rPr lang="en-US" sz="2200" b="1" dirty="0">
                 <a:solidFill>
                   <a:srgbClr val="7B3A8E"/>
                 </a:solidFill>
               </a:rPr>
               <a:t>Key words today</a:t>
             </a:r>
-            <a:endParaRPr lang="en-US" sz="2000" dirty="0"/>
+            <a:endParaRPr lang="en-US" sz="2200" dirty="0"/>
           </a:p>
         </p:txBody>
       </p:sp>
@@ -5363,360 +5337,295 @@
         </p:nvSpPr>
         <p:spPr>
           <a:xfrm>
-            <a:off x="6583680" y="1874520"/>
-            <a:ext cx="5029200" cy="4023360"/>
-          </a:xfrm>
-          <a:prstGeom prst="rect">
-            <a:avLst/>
-          </a:prstGeom>
-          <a:noFill/>
-          <a:ln/>
-        </p:spPr>
-        <p:txBody>
-          <a:bodyPr wrap="square" lIns="0" tIns="0" rIns="0" bIns="0" rtlCol="0" anchor="t">
-            <a:normAutofit/>
-          </a:bodyPr>
+            <a:off x="548640" y="4069080"/>
+            <a:ext cx="3515258" cy="1920240"/>
+          </a:xfrm>
+          <a:prstGeom prst="rect">
+            <a:avLst/>
+          </a:prstGeom>
+          <a:noFill/>
+          <a:ln/>
+        </p:spPr>
+        <p:txBody>
+          <a:bodyPr wrap="square" lIns="0" tIns="0" rIns="0" bIns="0" rtlCol="0" anchor="t"/>
+          <a:lstStyle/>
+          <a:p>
+            <a:pPr marL="304800" indent="-304800">
+              <a:spcAft>
+                <a:spcPts val="600"/>
+              </a:spcAft>
+              <a:buSzPct val="100000"/>
+              <a:buChar char="•"/>
+            </a:pPr>
+            <a:r>
+              <a:rPr lang="en-US" sz="2100" b="1" dirty="0">
+                <a:solidFill>
+                  <a:srgbClr val="0F2A5F"/>
+                </a:solidFill>
+              </a:rPr>
+              <a:t>white blood cell</a:t>
+            </a:r>
+            <a:endParaRPr lang="en-US" sz="2100" dirty="0"/>
+          </a:p>
+          <a:p>
+            <a:pPr marL="304800" indent="-304800">
+              <a:spcAft>
+                <a:spcPts val="600"/>
+              </a:spcAft>
+              <a:buSzPct val="100000"/>
+              <a:buChar char="•"/>
+            </a:pPr>
+            <a:r>
+              <a:rPr lang="en-US" sz="2100" b="1" dirty="0">
+                <a:solidFill>
+                  <a:srgbClr val="0F2A5F"/>
+                </a:solidFill>
+              </a:rPr>
+              <a:t>phagocyte</a:t>
+            </a:r>
+            <a:endParaRPr lang="en-US" sz="2100" dirty="0"/>
+          </a:p>
+          <a:p>
+            <a:pPr marL="304800" indent="-304800">
+              <a:spcAft>
+                <a:spcPts val="600"/>
+              </a:spcAft>
+              <a:buSzPct val="100000"/>
+              <a:buChar char="•"/>
+            </a:pPr>
+            <a:r>
+              <a:rPr lang="en-US" sz="2100" b="1" dirty="0">
+                <a:solidFill>
+                  <a:srgbClr val="0F2A5F"/>
+                </a:solidFill>
+              </a:rPr>
+              <a:t>lymphocyte</a:t>
+            </a:r>
+            <a:endParaRPr lang="en-US" sz="2100" dirty="0"/>
+          </a:p>
+          <a:p>
+            <a:pPr marL="304800" indent="-304800">
+              <a:spcAft>
+                <a:spcPts val="600"/>
+              </a:spcAft>
+              <a:buSzPct val="100000"/>
+              <a:buChar char="•"/>
+            </a:pPr>
+            <a:r>
+              <a:rPr lang="en-US" sz="2100" b="1" dirty="0">
+                <a:solidFill>
+                  <a:srgbClr val="0F2A5F"/>
+                </a:solidFill>
+              </a:rPr>
+              <a:t>antibody</a:t>
+            </a:r>
+            <a:endParaRPr lang="en-US" sz="2100" dirty="0"/>
+          </a:p>
+        </p:txBody>
+      </p:sp>
+      <p:sp>
+        <p:nvSpPr>
+          <p:cNvPr id="12" name="Text 10"/>
+          <p:cNvSpPr txBox="1"/>
+          <p:nvPr/>
+        </p:nvSpPr>
+        <p:spPr>
+          <a:xfrm>
+            <a:off x="4338218" y="4069080"/>
+            <a:ext cx="3515258" cy="1920240"/>
+          </a:xfrm>
+          <a:prstGeom prst="rect">
+            <a:avLst/>
+          </a:prstGeom>
+          <a:noFill/>
+          <a:ln/>
+        </p:spPr>
+        <p:txBody>
+          <a:bodyPr wrap="square" lIns="0" tIns="0" rIns="0" bIns="0" rtlCol="0" anchor="t"/>
+          <a:lstStyle/>
+          <a:p>
+            <a:pPr marL="304800" indent="-304800">
+              <a:spcAft>
+                <a:spcPts val="600"/>
+              </a:spcAft>
+              <a:buSzPct val="100000"/>
+              <a:buChar char="•"/>
+            </a:pPr>
+            <a:r>
+              <a:rPr lang="en-US" sz="2100" b="1" dirty="0">
+                <a:solidFill>
+                  <a:srgbClr val="0F2A5F"/>
+                </a:solidFill>
+              </a:rPr>
+              <a:t>specific</a:t>
+            </a:r>
+            <a:endParaRPr lang="en-US" sz="2100" dirty="0"/>
+          </a:p>
+          <a:p>
+            <a:pPr marL="304800" indent="-304800">
+              <a:spcAft>
+                <a:spcPts val="600"/>
+              </a:spcAft>
+              <a:buSzPct val="100000"/>
+              <a:buChar char="•"/>
+            </a:pPr>
+            <a:r>
+              <a:rPr lang="en-US" sz="2100" b="1" dirty="0">
+                <a:solidFill>
+                  <a:srgbClr val="0F2A5F"/>
+                </a:solidFill>
+              </a:rPr>
+              <a:t>memory cell</a:t>
+            </a:r>
+            <a:endParaRPr lang="en-US" sz="2100" dirty="0"/>
+          </a:p>
+          <a:p>
+            <a:pPr marL="304800" indent="-304800">
+              <a:spcAft>
+                <a:spcPts val="600"/>
+              </a:spcAft>
+              <a:buSzPct val="100000"/>
+              <a:buChar char="•"/>
+            </a:pPr>
+            <a:r>
+              <a:rPr lang="en-US" sz="2100" b="1" dirty="0">
+                <a:solidFill>
+                  <a:srgbClr val="0F2A5F"/>
+                </a:solidFill>
+              </a:rPr>
+              <a:t>immune</a:t>
+            </a:r>
+            <a:endParaRPr lang="en-US" sz="2100" dirty="0"/>
+          </a:p>
+          <a:p>
+            <a:pPr marL="304800" indent="-304800">
+              <a:spcAft>
+                <a:spcPts val="600"/>
+              </a:spcAft>
+              <a:buSzPct val="100000"/>
+              <a:buChar char="•"/>
+            </a:pPr>
+            <a:r>
+              <a:rPr lang="en-US" sz="2100" b="1" dirty="0">
+                <a:solidFill>
+                  <a:srgbClr val="0F2A5F"/>
+                </a:solidFill>
+              </a:rPr>
+              <a:t>vaccine</a:t>
+            </a:r>
+            <a:endParaRPr lang="en-US" sz="2100" dirty="0"/>
+          </a:p>
+        </p:txBody>
+      </p:sp>
+      <p:sp>
+        <p:nvSpPr>
+          <p:cNvPr id="13" name="Text 11"/>
+          <p:cNvSpPr txBox="1"/>
+          <p:nvPr/>
+        </p:nvSpPr>
+        <p:spPr>
+          <a:xfrm>
+            <a:off x="8127797" y="4069080"/>
+            <a:ext cx="3515258" cy="1920240"/>
+          </a:xfrm>
+          <a:prstGeom prst="rect">
+            <a:avLst/>
+          </a:prstGeom>
+          <a:noFill/>
+          <a:ln/>
+        </p:spPr>
+        <p:txBody>
+          <a:bodyPr wrap="square" lIns="0" tIns="0" rIns="0" bIns="0" rtlCol="0" anchor="t"/>
+          <a:lstStyle/>
+          <a:p>
+            <a:pPr marL="304800" indent="-304800">
+              <a:spcAft>
+                <a:spcPts val="600"/>
+              </a:spcAft>
+              <a:buSzPct val="100000"/>
+              <a:buChar char="•"/>
+            </a:pPr>
+            <a:r>
+              <a:rPr lang="en-US" sz="2200" b="1" dirty="0">
+                <a:solidFill>
+                  <a:srgbClr val="0F2A5F"/>
+                </a:solidFill>
+              </a:rPr>
+              <a:t>virus</a:t>
+            </a:r>
+            <a:endParaRPr lang="en-US" sz="2200" dirty="0"/>
+          </a:p>
+          <a:p>
+            <a:pPr marL="304800" indent="-304800">
+              <a:spcAft>
+                <a:spcPts val="600"/>
+              </a:spcAft>
+              <a:buSzPct val="100000"/>
+              <a:buChar char="•"/>
+            </a:pPr>
+            <a:r>
+              <a:rPr lang="en-US" sz="2200" b="1" dirty="0">
+                <a:solidFill>
+                  <a:srgbClr val="0F2A5F"/>
+                </a:solidFill>
+              </a:rPr>
+              <a:t>dose</a:t>
+            </a:r>
+            <a:endParaRPr lang="en-US" sz="2200" dirty="0"/>
+          </a:p>
+          <a:p>
+            <a:pPr marL="304800" indent="-304800">
+              <a:spcAft>
+                <a:spcPts val="600"/>
+              </a:spcAft>
+              <a:buSzPct val="100000"/>
+              <a:buChar char="•"/>
+            </a:pPr>
+            <a:r>
+              <a:rPr lang="en-US" sz="2200" b="1" dirty="0">
+                <a:solidFill>
+                  <a:srgbClr val="0F2A5F"/>
+                </a:solidFill>
+              </a:rPr>
+              <a:t>half-life</a:t>
+            </a:r>
+            <a:endParaRPr lang="en-US" sz="2200" dirty="0"/>
+          </a:p>
+        </p:txBody>
+      </p:sp>
+      <p:sp>
+        <p:nvSpPr>
+          <p:cNvPr id="14" name="Text 12"/>
+          <p:cNvSpPr txBox="1"/>
+          <p:nvPr/>
+        </p:nvSpPr>
+        <p:spPr>
+          <a:xfrm>
+            <a:off x="548640" y="6035040"/>
+            <a:ext cx="10881360" cy="320040"/>
+          </a:xfrm>
+          <a:prstGeom prst="rect">
+            <a:avLst/>
+          </a:prstGeom>
+          <a:noFill/>
+          <a:ln/>
+        </p:spPr>
+        <p:txBody>
+          <a:bodyPr wrap="square" lIns="0" tIns="0" rIns="0" bIns="0" rtlCol="0" anchor="ctr"/>
           <a:lstStyle/>
           <a:p>
             <a:pPr indent="0" marL="0">
-              <a:spcAft>
-                <a:spcPts val="500"/>
-              </a:spcAft>
-              <a:buNone/>
-            </a:pPr>
-            <a:r>
-              <a:rPr lang="en-US" sz="1300" b="1" dirty="0">
-                <a:solidFill>
-                  <a:srgbClr val="0F2A5F"/>
-                </a:solidFill>
-              </a:rPr>
-              <a:t>white blood cell</a:t>
-            </a:r>
-            <a:pPr indent="0" marL="0">
-              <a:spcAft>
-                <a:spcPts val="500"/>
-              </a:spcAft>
-              <a:buNone/>
-            </a:pPr>
-            <a:r>
-              <a:rPr lang="en-US" sz="1300" dirty="0">
-                <a:solidFill>
-                  <a:srgbClr val="141B26"/>
-                </a:solidFill>
-              </a:rPr>
-              <a:t>  a blood cell that fights pathogens</a:t>
-            </a:r>
-            <a:endParaRPr lang="en-US" sz="1300" dirty="0"/>
-          </a:p>
-          <a:p>
-            <a:pPr indent="0" marL="0">
-              <a:spcAft>
-                <a:spcPts val="500"/>
-              </a:spcAft>
-              <a:buNone/>
-            </a:pPr>
-            <a:r>
-              <a:rPr lang="en-US" sz="1300" b="1" dirty="0">
-                <a:solidFill>
-                  <a:srgbClr val="0F2A5F"/>
-                </a:solidFill>
-              </a:rPr>
-              <a:t>phagocyte</a:t>
-            </a:r>
-            <a:pPr indent="0" marL="0">
-              <a:spcAft>
-                <a:spcPts val="500"/>
-              </a:spcAft>
-              <a:buNone/>
-            </a:pPr>
-            <a:r>
-              <a:rPr lang="en-US" sz="1300" dirty="0">
-                <a:solidFill>
-                  <a:srgbClr val="141B26"/>
-                </a:solidFill>
-              </a:rPr>
-              <a:t>  a white blood cell that surrounds, ingests and digests microorganisms</a:t>
-            </a:r>
-            <a:endParaRPr lang="en-US" sz="1300" dirty="0"/>
-          </a:p>
-          <a:p>
-            <a:pPr indent="0" marL="0">
-              <a:spcAft>
-                <a:spcPts val="500"/>
-              </a:spcAft>
-              <a:buNone/>
-            </a:pPr>
-            <a:r>
-              <a:rPr lang="en-US" sz="1300" b="1" dirty="0">
-                <a:solidFill>
-                  <a:srgbClr val="0F2A5F"/>
-                </a:solidFill>
-              </a:rPr>
-              <a:t>lymphocyte</a:t>
-            </a:r>
-            <a:pPr indent="0" marL="0">
-              <a:spcAft>
-                <a:spcPts val="500"/>
-              </a:spcAft>
-              <a:buNone/>
-            </a:pPr>
-            <a:r>
-              <a:rPr lang="en-US" sz="1300" dirty="0">
-                <a:solidFill>
-                  <a:srgbClr val="141B26"/>
-                </a:solidFill>
-              </a:rPr>
-              <a:t>  a white blood cell that makes antibodies</a:t>
-            </a:r>
-            <a:endParaRPr lang="en-US" sz="1300" dirty="0"/>
-          </a:p>
-          <a:p>
-            <a:pPr indent="0" marL="0">
-              <a:spcAft>
-                <a:spcPts val="500"/>
-              </a:spcAft>
-              <a:buNone/>
-            </a:pPr>
-            <a:r>
-              <a:rPr lang="en-US" sz="1300" b="1" dirty="0">
-                <a:solidFill>
-                  <a:srgbClr val="0F2A5F"/>
-                </a:solidFill>
-              </a:rPr>
-              <a:t>antibody</a:t>
-            </a:r>
-            <a:pPr indent="0" marL="0">
-              <a:spcAft>
-                <a:spcPts val="500"/>
-              </a:spcAft>
-              <a:buNone/>
-            </a:pPr>
-            <a:r>
-              <a:rPr lang="en-US" sz="1300" dirty="0">
-                <a:solidFill>
-                  <a:srgbClr val="141B26"/>
-                </a:solidFill>
-              </a:rPr>
-              <a:t>  a protein that sticks to one type of pathogen</a:t>
-            </a:r>
-            <a:endParaRPr lang="en-US" sz="1300" dirty="0"/>
-          </a:p>
-          <a:p>
-            <a:pPr indent="0" marL="0">
-              <a:spcAft>
-                <a:spcPts val="500"/>
-              </a:spcAft>
-              <a:buNone/>
-            </a:pPr>
-            <a:r>
-              <a:rPr lang="en-US" sz="1300" b="1" dirty="0">
-                <a:solidFill>
-                  <a:srgbClr val="0F2A5F"/>
-                </a:solidFill>
-              </a:rPr>
-              <a:t>specific</a:t>
-            </a:r>
-            <a:pPr indent="0" marL="0">
-              <a:spcAft>
-                <a:spcPts val="500"/>
-              </a:spcAft>
-              <a:buNone/>
-            </a:pPr>
-            <a:r>
-              <a:rPr lang="en-US" sz="1300" dirty="0">
-                <a:solidFill>
-                  <a:srgbClr val="141B26"/>
-                </a:solidFill>
-              </a:rPr>
-              <a:t>  fits only one type of pathogen</a:t>
-            </a:r>
-            <a:endParaRPr lang="en-US" sz="1300" dirty="0"/>
-          </a:p>
-          <a:p>
-            <a:pPr indent="0" marL="0">
-              <a:spcAft>
-                <a:spcPts val="500"/>
-              </a:spcAft>
-              <a:buNone/>
-            </a:pPr>
-            <a:r>
-              <a:rPr lang="en-US" sz="1300" b="1" dirty="0">
-                <a:solidFill>
-                  <a:srgbClr val="0F2A5F"/>
-                </a:solidFill>
-              </a:rPr>
-              <a:t>memory cell</a:t>
-            </a:r>
-            <a:pPr indent="0" marL="0">
-              <a:spcAft>
-                <a:spcPts val="500"/>
-              </a:spcAft>
-              <a:buNone/>
-            </a:pPr>
-            <a:r>
-              <a:rPr lang="en-US" sz="1300" dirty="0">
-                <a:solidFill>
-                  <a:srgbClr val="141B26"/>
-                </a:solidFill>
-              </a:rPr>
-              <a:t>  a lymphocyte that stays in the body ready to make antibodies quickly</a:t>
-            </a:r>
-            <a:endParaRPr lang="en-US" sz="1300" dirty="0"/>
-          </a:p>
-          <a:p>
-            <a:pPr indent="0" marL="0">
-              <a:spcAft>
-                <a:spcPts val="500"/>
-              </a:spcAft>
-              <a:buNone/>
-            </a:pPr>
-            <a:r>
-              <a:rPr lang="en-US" sz="1300" b="1" dirty="0">
-                <a:solidFill>
-                  <a:srgbClr val="0F2A5F"/>
-                </a:solidFill>
-              </a:rPr>
-              <a:t>immune</a:t>
-            </a:r>
-            <a:pPr indent="0" marL="0">
-              <a:spcAft>
-                <a:spcPts val="500"/>
-              </a:spcAft>
-              <a:buNone/>
-            </a:pPr>
-            <a:r>
-              <a:rPr lang="en-US" sz="1300" dirty="0">
-                <a:solidFill>
-                  <a:srgbClr val="141B26"/>
-                </a:solidFill>
-              </a:rPr>
-              <a:t>  protected against a disease, so you do not become ill with it</a:t>
-            </a:r>
-            <a:endParaRPr lang="en-US" sz="1300" dirty="0"/>
-          </a:p>
-          <a:p>
-            <a:pPr indent="0" marL="0">
-              <a:spcAft>
-                <a:spcPts val="500"/>
-              </a:spcAft>
-              <a:buNone/>
-            </a:pPr>
-            <a:r>
-              <a:rPr lang="en-US" sz="1300" b="1" dirty="0">
-                <a:solidFill>
-                  <a:srgbClr val="0F2A5F"/>
-                </a:solidFill>
-              </a:rPr>
-              <a:t>vaccine</a:t>
-            </a:r>
-            <a:pPr indent="0" marL="0">
-              <a:spcAft>
-                <a:spcPts val="500"/>
-              </a:spcAft>
-              <a:buNone/>
-            </a:pPr>
-            <a:r>
-              <a:rPr lang="en-US" sz="1300" dirty="0">
-                <a:solidFill>
-                  <a:srgbClr val="141B26"/>
-                </a:solidFill>
-              </a:rPr>
-              <a:t>  a substance containing parts of a pathogen, given to make a person immune</a:t>
-            </a:r>
-            <a:endParaRPr lang="en-US" sz="1300" dirty="0"/>
-          </a:p>
-          <a:p>
-            <a:pPr indent="0" marL="0">
-              <a:spcAft>
-                <a:spcPts val="500"/>
-              </a:spcAft>
-              <a:buNone/>
-            </a:pPr>
-            <a:r>
-              <a:rPr lang="en-US" sz="1300" b="1" dirty="0">
-                <a:solidFill>
-                  <a:srgbClr val="0F2A5F"/>
-                </a:solidFill>
-              </a:rPr>
-              <a:t>virus</a:t>
-            </a:r>
-            <a:pPr indent="0" marL="0">
-              <a:spcAft>
-                <a:spcPts val="500"/>
-              </a:spcAft>
-              <a:buNone/>
-            </a:pPr>
-            <a:r>
-              <a:rPr lang="en-US" sz="1300" dirty="0">
-                <a:solidFill>
-                  <a:srgbClr val="141B26"/>
-                </a:solidFill>
-              </a:rPr>
-              <a:t>  a very small pathogen that can only copy itself inside a cell</a:t>
-            </a:r>
-            <a:endParaRPr lang="en-US" sz="1300" dirty="0"/>
-          </a:p>
-          <a:p>
-            <a:pPr indent="0" marL="0">
-              <a:spcAft>
-                <a:spcPts val="500"/>
-              </a:spcAft>
-              <a:buNone/>
-            </a:pPr>
-            <a:r>
-              <a:rPr lang="en-US" sz="1300" b="1" dirty="0">
-                <a:solidFill>
-                  <a:srgbClr val="0F2A5F"/>
-                </a:solidFill>
-              </a:rPr>
-              <a:t>dose</a:t>
-            </a:r>
-            <a:pPr indent="0" marL="0">
-              <a:spcAft>
-                <a:spcPts val="500"/>
-              </a:spcAft>
-              <a:buNone/>
-            </a:pPr>
-            <a:r>
-              <a:rPr lang="en-US" sz="1300" dirty="0">
-                <a:solidFill>
-                  <a:srgbClr val="141B26"/>
-                </a:solidFill>
-              </a:rPr>
-              <a:t>  the amount of a medicine given at one time</a:t>
-            </a:r>
-            <a:endParaRPr lang="en-US" sz="1300" dirty="0"/>
-          </a:p>
-          <a:p>
-            <a:pPr indent="0" marL="0">
-              <a:spcAft>
-                <a:spcPts val="500"/>
-              </a:spcAft>
-              <a:buNone/>
-            </a:pPr>
-            <a:r>
-              <a:rPr lang="en-US" sz="1300" b="1" dirty="0">
-                <a:solidFill>
-                  <a:srgbClr val="0F2A5F"/>
-                </a:solidFill>
-              </a:rPr>
-              <a:t>half-life</a:t>
-            </a:r>
-            <a:pPr indent="0" marL="0">
-              <a:spcAft>
-                <a:spcPts val="500"/>
-              </a:spcAft>
-              <a:buNone/>
-            </a:pPr>
-            <a:r>
-              <a:rPr lang="en-US" sz="1300" dirty="0">
-                <a:solidFill>
-                  <a:srgbClr val="141B26"/>
-                </a:solidFill>
-              </a:rPr>
-              <a:t>  the time for the amount of a medicine in the body to fall by half</a:t>
-            </a:r>
-            <a:endParaRPr lang="en-US" sz="1300" dirty="0"/>
+              <a:buNone/>
+            </a:pPr>
+            <a:r>
+              <a:rPr lang="en-US" sz="1400" i="1" dirty="0">
+                <a:solidFill>
+                  <a:srgbClr val="5B6574"/>
+                </a:solidFill>
+              </a:rPr>
+              <a:t>Meanings are in the key words box on your worksheet.</a:t>
+            </a:r>
+            <a:endParaRPr lang="en-US" sz="1400" dirty="0"/>
           </a:p>
         </p:txBody>
       </p:sp>
@@ -5900,32 +5809,30 @@
         <p:spPr>
           <a:xfrm>
             <a:off x="548640" y="1371600"/>
-            <a:ext cx="5394960" cy="2377440"/>
-          </a:xfrm>
-          <a:prstGeom prst="rect">
-            <a:avLst/>
-          </a:prstGeom>
-          <a:noFill/>
-          <a:ln/>
-        </p:spPr>
-        <p:txBody>
-          <a:bodyPr wrap="square" lIns="0" tIns="0" rIns="0" bIns="0" rtlCol="0" anchor="t">
-            <a:normAutofit/>
-          </a:bodyPr>
+            <a:ext cx="5394960" cy="2651760"/>
+          </a:xfrm>
+          <a:prstGeom prst="rect">
+            <a:avLst/>
+          </a:prstGeom>
+          <a:noFill/>
+          <a:ln/>
+        </p:spPr>
+        <p:txBody>
+          <a:bodyPr wrap="square" lIns="0" tIns="0" rIns="0" bIns="0" rtlCol="0" anchor="t"/>
           <a:lstStyle/>
           <a:p>
             <a:pPr indent="0" marL="0">
               <a:buNone/>
             </a:pPr>
             <a:r>
-              <a:rPr lang="en-US" sz="2800" b="1" dirty="0">
+              <a:rPr lang="en-US" sz="3000" b="1" dirty="0">
                 <a:solidFill>
                   <a:srgbClr val="0F2A5F"/>
                 </a:solidFill>
               </a:rPr>
               <a:t>These bacteria have got into your blood. Phagocytes, a type of white blood cell, are on their way. What do you think happens next?</a:t>
             </a:r>
-            <a:endParaRPr lang="en-US" sz="2800" dirty="0"/>
+            <a:endParaRPr lang="en-US" sz="3000" dirty="0"/>
           </a:p>
         </p:txBody>
       </p:sp>
@@ -5937,19 +5844,17 @@
         </p:nvSpPr>
         <p:spPr>
           <a:xfrm>
-            <a:off x="548640" y="3794760"/>
-            <a:ext cx="5394960" cy="2103120"/>
-          </a:xfrm>
-          <a:prstGeom prst="rect">
-            <a:avLst/>
-          </a:prstGeom>
-          <a:noFill/>
-          <a:ln/>
-        </p:spPr>
-        <p:txBody>
-          <a:bodyPr wrap="square" lIns="0" tIns="0" rIns="0" bIns="0" rtlCol="0" anchor="t">
-            <a:normAutofit/>
-          </a:bodyPr>
+            <a:off x="548640" y="4114800"/>
+            <a:ext cx="5394960" cy="1828800"/>
+          </a:xfrm>
+          <a:prstGeom prst="rect">
+            <a:avLst/>
+          </a:prstGeom>
+          <a:noFill/>
+          <a:ln/>
+        </p:spPr>
+        <p:txBody>
+          <a:bodyPr wrap="square" lIns="0" tIns="0" rIns="0" bIns="0" rtlCol="0" anchor="t"/>
           <a:lstStyle/>
           <a:p>
             <a:pPr indent="0" marL="0">
@@ -5959,14 +5864,14 @@
               <a:buNone/>
             </a:pPr>
             <a:r>
-              <a:rPr lang="en-US" sz="1600" dirty="0">
+              <a:rPr lang="en-US" sz="2000" dirty="0">
                 <a:solidFill>
                   <a:srgbClr val="141B26"/>
                 </a:solidFill>
               </a:rPr>
               <a:t>Talk to a partner: what does your body do in the days after a pathogen gets in?</a:t>
             </a:r>
-            <a:endParaRPr lang="en-US" sz="1600" dirty="0"/>
+            <a:endParaRPr lang="en-US" sz="2000" dirty="0"/>
           </a:p>
         </p:txBody>
       </p:sp>
@@ -6003,7 +5908,7 @@
         <p:spPr>
           <a:xfrm>
             <a:off x="6309360" y="5532120"/>
-            <a:ext cx="5303520" cy="502920"/>
+            <a:ext cx="5303520" cy="548640"/>
           </a:xfrm>
           <a:prstGeom prst="rect">
             <a:avLst/>
@@ -6019,7 +5924,7 @@
               <a:buNone/>
             </a:pPr>
             <a:r>
-              <a:rPr lang="en-US" sz="1100" dirty="0">
+              <a:rPr lang="en-US" sz="1300" dirty="0">
                 <a:solidFill>
                   <a:srgbClr val="141B26"/>
                 </a:solidFill>
@@ -6029,21 +5934,21 @@
             <a:pPr algn="l" indent="0" marL="0">
               <a:buNone/>
             </a:pPr>
-            <a:endParaRPr lang="en-US" sz="1100" dirty="0"/>
+            <a:endParaRPr lang="en-US" sz="1300" dirty="0"/>
           </a:p>
           <a:p>
             <a:pPr algn="l" indent="0" marL="0">
               <a:buNone/>
             </a:pPr>
             <a:r>
-              <a:rPr lang="en-US" sz="800" dirty="0">
+              <a:rPr lang="en-US" sz="900" dirty="0">
                 <a:solidFill>
                   <a:srgbClr val="5B6574"/>
                 </a:solidFill>
               </a:rPr>
               <a:t>Image: National Institutes of Health (NIH), Public domain, via Wikimedia Commons</a:t>
             </a:r>
-            <a:endParaRPr lang="en-US" sz="1100" dirty="0"/>
+            <a:endParaRPr lang="en-US" sz="1300" dirty="0"/>
           </a:p>
         </p:txBody>
       </p:sp>
@@ -6243,14 +6148,14 @@
               <a:buNone/>
             </a:pPr>
             <a:r>
-              <a:rPr lang="en-US" sz="1600" dirty="0">
+              <a:rPr lang="en-US" sz="1700" dirty="0">
                 <a:solidFill>
                   <a:srgbClr val="141B26"/>
                 </a:solidFill>
               </a:rPr>
               <a:t>Your blood carries two main types of white blood cell that attack pathogens in different ways.</a:t>
             </a:r>
-            <a:endParaRPr lang="en-US" sz="1600" dirty="0"/>
+            <a:endParaRPr lang="en-US" sz="1700" dirty="0"/>
           </a:p>
         </p:txBody>
       </p:sp>
@@ -6321,16 +6226,14 @@
           <a:ln/>
         </p:spPr>
         <p:txBody>
-          <a:bodyPr wrap="square" lIns="0" tIns="0" rIns="0" bIns="0" rtlCol="0" anchor="ctr">
-            <a:normAutofit/>
-          </a:bodyPr>
+          <a:bodyPr wrap="square" lIns="0" tIns="0" rIns="0" bIns="0" rtlCol="0" anchor="ctr"/>
           <a:lstStyle/>
           <a:p>
             <a:pPr indent="0" marL="0">
               <a:buNone/>
             </a:pPr>
             <a:r>
-              <a:rPr lang="en-US" sz="1400" b="1" dirty="0">
+              <a:rPr lang="en-US" sz="1700" b="1" dirty="0">
                 <a:solidFill>
                   <a:srgbClr val="7B3A8E"/>
                 </a:solidFill>
@@ -6341,14 +6244,14 @@
               <a:buNone/>
             </a:pPr>
             <a:r>
-              <a:rPr lang="en-US" sz="1400" dirty="0">
+              <a:rPr lang="en-US" sz="1700" dirty="0">
                 <a:solidFill>
                   <a:srgbClr val="141B26"/>
                 </a:solidFill>
               </a:rPr>
               <a:t>Phagocytes ingest pathogens. Lymphocytes make antibodies that fit the surface of one type of pathogen.</a:t>
             </a:r>
-            <a:endParaRPr lang="en-US" sz="1400" dirty="0"/>
+            <a:endParaRPr lang="en-US" sz="1700" dirty="0"/>
           </a:p>
         </p:txBody>
       </p:sp>
@@ -6531,8 +6434,8 @@
         </p:nvSpPr>
         <p:spPr>
           <a:xfrm>
-            <a:off x="548640" y="6053328"/>
-            <a:ext cx="9601200" cy="292608"/>
+            <a:off x="548640" y="6035040"/>
+            <a:ext cx="9601200" cy="310896"/>
           </a:xfrm>
           <a:prstGeom prst="rect">
             <a:avLst/>
@@ -6548,7 +6451,7 @@
               <a:buNone/>
             </a:pPr>
             <a:r>
-              <a:rPr lang="en-US" sz="1200" b="1" dirty="0">
+              <a:rPr lang="en-US" sz="1400" b="1" dirty="0">
                 <a:solidFill>
                   <a:srgbClr val="7B3A8E"/>
                 </a:solidFill>
@@ -6559,14 +6462,14 @@
               <a:buNone/>
             </a:pPr>
             <a:r>
-              <a:rPr lang="en-US" sz="1200" dirty="0">
+              <a:rPr lang="en-US" sz="1400" dirty="0">
                 <a:solidFill>
                   <a:srgbClr val="7B3A8E"/>
                 </a:solidFill>
               </a:rPr>
               <a:t>lymphocyte   ·   antibody   ·   specific</a:t>
             </a:r>
-            <a:endParaRPr lang="en-US" sz="1200" dirty="0"/>
+            <a:endParaRPr lang="en-US" sz="1400" dirty="0"/>
           </a:p>
         </p:txBody>
       </p:sp>
@@ -6588,81 +6491,79 @@
           <a:ln/>
         </p:spPr>
         <p:txBody>
-          <a:bodyPr wrap="square" lIns="0" tIns="0" rIns="0" bIns="0" rtlCol="0" anchor="t">
-            <a:normAutofit/>
-          </a:bodyPr>
-          <a:lstStyle/>
-          <a:p>
-            <a:pPr marL="228600" indent="-228600">
+          <a:bodyPr wrap="square" lIns="0" tIns="0" rIns="0" bIns="0" rtlCol="0" anchor="t"/>
+          <a:lstStyle/>
+          <a:p>
+            <a:pPr marL="304800" indent="-304800">
               <a:spcAft>
-                <a:spcPts val="600"/>
+                <a:spcPts val="800"/>
               </a:spcAft>
               <a:buSzPct val="100000"/>
               <a:buChar char="•"/>
             </a:pPr>
             <a:r>
-              <a:rPr lang="en-US" sz="1700" dirty="0">
+              <a:rPr lang="en-US" sz="2000" dirty="0">
                 <a:solidFill>
                   <a:srgbClr val="141B26"/>
                 </a:solidFill>
               </a:rPr>
               <a:t>Each type of pathogen has a different surface, so it needs a different antibody.</a:t>
             </a:r>
-            <a:endParaRPr lang="en-US" sz="1700" dirty="0"/>
-          </a:p>
-          <a:p>
-            <a:pPr marL="228600" indent="-228600">
+            <a:endParaRPr lang="en-US" sz="2000" dirty="0"/>
+          </a:p>
+          <a:p>
+            <a:pPr marL="304800" indent="-304800">
               <a:spcAft>
-                <a:spcPts val="600"/>
+                <a:spcPts val="800"/>
               </a:spcAft>
               <a:buSzPct val="100000"/>
               <a:buChar char="•"/>
             </a:pPr>
             <a:r>
-              <a:rPr lang="en-US" sz="1700" dirty="0">
+              <a:rPr lang="en-US" sz="2000" dirty="0">
                 <a:solidFill>
                   <a:srgbClr val="141B26"/>
                 </a:solidFill>
               </a:rPr>
               <a:t>Lymphocytes must make new, specific antibodies for each new pathogen.</a:t>
             </a:r>
-            <a:endParaRPr lang="en-US" sz="1700" dirty="0"/>
-          </a:p>
-          <a:p>
-            <a:pPr marL="228600" indent="-228600">
+            <a:endParaRPr lang="en-US" sz="2000" dirty="0"/>
+          </a:p>
+          <a:p>
+            <a:pPr marL="304800" indent="-304800">
               <a:spcAft>
-                <a:spcPts val="600"/>
+                <a:spcPts val="800"/>
               </a:spcAft>
               <a:buSzPct val="100000"/>
               <a:buChar char="•"/>
             </a:pPr>
             <a:r>
-              <a:rPr lang="en-US" sz="1700" dirty="0">
+              <a:rPr lang="en-US" sz="2000" dirty="0">
                 <a:solidFill>
                   <a:srgbClr val="141B26"/>
                 </a:solidFill>
               </a:rPr>
               <a:t>This takes days. Meanwhile the pathogen multiplies and you feel ill.</a:t>
             </a:r>
-            <a:endParaRPr lang="en-US" sz="1700" dirty="0"/>
-          </a:p>
-          <a:p>
-            <a:pPr marL="228600" indent="-228600">
+            <a:endParaRPr lang="en-US" sz="2000" dirty="0"/>
+          </a:p>
+          <a:p>
+            <a:pPr marL="304800" indent="-304800">
               <a:spcAft>
-                <a:spcPts val="600"/>
+                <a:spcPts val="800"/>
               </a:spcAft>
               <a:buSzPct val="100000"/>
               <a:buChar char="•"/>
             </a:pPr>
             <a:r>
-              <a:rPr lang="en-US" sz="1700" dirty="0">
+              <a:rPr lang="en-US" sz="2000" dirty="0">
                 <a:solidFill>
                   <a:srgbClr val="141B26"/>
                 </a:solidFill>
               </a:rPr>
               <a:t>Once there are enough antibodies, the pathogens are destroyed and you recover.</a:t>
             </a:r>
-            <a:endParaRPr lang="en-US" sz="1700" dirty="0"/>
+            <a:endParaRPr lang="en-US" sz="2000" dirty="0"/>
           </a:p>
         </p:txBody>
       </p:sp>
@@ -6699,7 +6600,7 @@
         <p:spPr>
           <a:xfrm>
             <a:off x="6583680" y="4983480"/>
-            <a:ext cx="5029200" cy="502920"/>
+            <a:ext cx="5029200" cy="548640"/>
           </a:xfrm>
           <a:prstGeom prst="rect">
             <a:avLst/>
@@ -6715,7 +6616,7 @@
               <a:buNone/>
             </a:pPr>
             <a:r>
-              <a:rPr lang="en-US" sz="1100" dirty="0">
+              <a:rPr lang="en-US" sz="1300" dirty="0">
                 <a:solidFill>
                   <a:srgbClr val="141B26"/>
                 </a:solidFill>
@@ -6725,21 +6626,21 @@
             <a:pPr algn="l" indent="0" marL="0">
               <a:buNone/>
             </a:pPr>
-            <a:endParaRPr lang="en-US" sz="1100" dirty="0"/>
+            <a:endParaRPr lang="en-US" sz="1300" dirty="0"/>
           </a:p>
           <a:p>
             <a:pPr algn="l" indent="0" marL="0">
               <a:buNone/>
             </a:pPr>
             <a:r>
-              <a:rPr lang="en-US" sz="800" dirty="0">
+              <a:rPr lang="en-US" sz="900" dirty="0">
                 <a:solidFill>
                   <a:srgbClr val="5B6574"/>
                 </a:solidFill>
               </a:rPr>
               <a:t>Image: Unknown photographer/artist (False color modifications made by myself--DO11.10), Public domain, via Wikimedia Commons</a:t>
             </a:r>
-            <a:endParaRPr lang="en-US" sz="1100" dirty="0"/>
+            <a:endParaRPr lang="en-US" sz="1300" dirty="0"/>
           </a:p>
         </p:txBody>
       </p:sp>
@@ -6786,16 +6687,14 @@
           <a:ln/>
         </p:spPr>
         <p:txBody>
-          <a:bodyPr wrap="square" lIns="0" tIns="0" rIns="0" bIns="0" rtlCol="0" anchor="ctr">
-            <a:normAutofit/>
-          </a:bodyPr>
+          <a:bodyPr wrap="square" lIns="0" tIns="0" rIns="0" bIns="0" rtlCol="0" anchor="ctr"/>
           <a:lstStyle/>
           <a:p>
             <a:pPr indent="0" marL="0">
               <a:buNone/>
             </a:pPr>
             <a:r>
-              <a:rPr lang="en-US" sz="1400" b="1" dirty="0">
+              <a:rPr lang="en-US" sz="1700" b="1" dirty="0">
                 <a:solidFill>
                   <a:srgbClr val="7B3A8E"/>
                 </a:solidFill>
@@ -6806,14 +6705,14 @@
               <a:buNone/>
             </a:pPr>
             <a:r>
-              <a:rPr lang="en-US" sz="1400" dirty="0">
+              <a:rPr lang="en-US" sz="1700" dirty="0">
                 <a:solidFill>
                   <a:srgbClr val="141B26"/>
                 </a:solidFill>
               </a:rPr>
               <a:t>Antibodies are specific: each type fits only one type of pathogen.</a:t>
             </a:r>
-            <a:endParaRPr lang="en-US" sz="1400" dirty="0"/>
+            <a:endParaRPr lang="en-US" sz="1700" dirty="0"/>
           </a:p>
         </p:txBody>
       </p:sp>
@@ -7013,14 +6912,14 @@
               <a:buNone/>
             </a:pPr>
             <a:r>
-              <a:rPr lang="en-US" sz="1600" dirty="0">
+              <a:rPr lang="en-US" sz="1800" dirty="0">
                 <a:solidFill>
                   <a:srgbClr val="141B26"/>
                 </a:solidFill>
               </a:rPr>
               <a:t>After an infection, some lymphocytes stay in the body as memory cells.</a:t>
             </a:r>
-            <a:endParaRPr lang="en-US" sz="1600" dirty="0"/>
+            <a:endParaRPr lang="en-US" sz="1800" dirty="0"/>
           </a:p>
         </p:txBody>
       </p:sp>
@@ -7091,16 +6990,14 @@
           <a:ln/>
         </p:spPr>
         <p:txBody>
-          <a:bodyPr wrap="square" lIns="0" tIns="0" rIns="0" bIns="0" rtlCol="0" anchor="ctr">
-            <a:normAutofit/>
-          </a:bodyPr>
+          <a:bodyPr wrap="square" lIns="0" tIns="0" rIns="0" bIns="0" rtlCol="0" anchor="ctr"/>
           <a:lstStyle/>
           <a:p>
             <a:pPr indent="0" marL="0">
               <a:buNone/>
             </a:pPr>
             <a:r>
-              <a:rPr lang="en-US" sz="1400" b="1" dirty="0">
+              <a:rPr lang="en-US" sz="1700" b="1" dirty="0">
                 <a:solidFill>
                   <a:srgbClr val="7B3A8E"/>
                 </a:solidFill>
@@ -7111,14 +7008,14 @@
               <a:buNone/>
             </a:pPr>
             <a:r>
-              <a:rPr lang="en-US" sz="1400" dirty="0">
+              <a:rPr lang="en-US" sz="1700" dirty="0">
                 <a:solidFill>
                   <a:srgbClr val="141B26"/>
                 </a:solidFill>
               </a:rPr>
               <a:t>The second time the same pathogen gets in, memory cells make antibodies fast and in large numbers: the pathogen is destroyed before you feel ill. You are immune.</a:t>
             </a:r>
-            <a:endParaRPr lang="en-US" sz="1400" dirty="0"/>
+            <a:endParaRPr lang="en-US" sz="1700" dirty="0"/>
           </a:p>
         </p:txBody>
       </p:sp>
@@ -7301,8 +7198,8 @@
         </p:nvSpPr>
         <p:spPr>
           <a:xfrm>
-            <a:off x="548640" y="6053328"/>
-            <a:ext cx="9601200" cy="292608"/>
+            <a:off x="548640" y="6035040"/>
+            <a:ext cx="9601200" cy="310896"/>
           </a:xfrm>
           <a:prstGeom prst="rect">
             <a:avLst/>
@@ -7318,7 +7215,7 @@
               <a:buNone/>
             </a:pPr>
             <a:r>
-              <a:rPr lang="en-US" sz="1200" b="1" dirty="0">
+              <a:rPr lang="en-US" sz="1400" b="1" dirty="0">
                 <a:solidFill>
                   <a:srgbClr val="7B3A8E"/>
                 </a:solidFill>
@@ -7329,14 +7226,14 @@
               <a:buNone/>
             </a:pPr>
             <a:r>
-              <a:rPr lang="en-US" sz="1200" dirty="0">
+              <a:rPr lang="en-US" sz="1400" dirty="0">
                 <a:solidFill>
                   <a:srgbClr val="7B3A8E"/>
                 </a:solidFill>
               </a:rPr>
               <a:t>vaccine   ·   immune   ·   virus</a:t>
             </a:r>
-            <a:endParaRPr lang="en-US" sz="1200" dirty="0"/>
+            <a:endParaRPr lang="en-US" sz="1400" dirty="0"/>
           </a:p>
         </p:txBody>
       </p:sp>
@@ -7358,81 +7255,79 @@
           <a:ln/>
         </p:spPr>
         <p:txBody>
-          <a:bodyPr wrap="square" lIns="0" tIns="0" rIns="0" bIns="0" rtlCol="0" anchor="t">
-            <a:normAutofit/>
-          </a:bodyPr>
-          <a:lstStyle/>
-          <a:p>
-            <a:pPr marL="228600" indent="-228600">
+          <a:bodyPr wrap="square" lIns="0" tIns="0" rIns="0" bIns="0" rtlCol="0" anchor="t"/>
+          <a:lstStyle/>
+          <a:p>
+            <a:pPr marL="304800" indent="-304800">
               <a:spcAft>
-                <a:spcPts val="600"/>
+                <a:spcPts val="800"/>
               </a:spcAft>
               <a:buSzPct val="100000"/>
               <a:buChar char="•"/>
             </a:pPr>
             <a:r>
-              <a:rPr lang="en-US" sz="1700" dirty="0">
+              <a:rPr lang="en-US" sz="2000" dirty="0">
                 <a:solidFill>
                   <a:srgbClr val="141B26"/>
                 </a:solidFill>
               </a:rPr>
               <a:t>A vaccine contains parts of the surface coating of a pathogen (or a dead or weakened form).</a:t>
             </a:r>
-            <a:endParaRPr lang="en-US" sz="1700" dirty="0"/>
-          </a:p>
-          <a:p>
-            <a:pPr marL="228600" indent="-228600">
+            <a:endParaRPr lang="en-US" sz="2000" dirty="0"/>
+          </a:p>
+          <a:p>
+            <a:pPr marL="304800" indent="-304800">
               <a:spcAft>
-                <a:spcPts val="600"/>
+                <a:spcPts val="800"/>
               </a:spcAft>
               <a:buSzPct val="100000"/>
               <a:buChar char="•"/>
             </a:pPr>
             <a:r>
-              <a:rPr lang="en-US" sz="1700" dirty="0">
+              <a:rPr lang="en-US" sz="2000" dirty="0">
                 <a:solidFill>
                   <a:srgbClr val="141B26"/>
                 </a:solidFill>
               </a:rPr>
               <a:t>Lymphocytes make antibodies and memory cells against it, without you having the disease.</a:t>
             </a:r>
-            <a:endParaRPr lang="en-US" sz="1700" dirty="0"/>
-          </a:p>
-          <a:p>
-            <a:pPr marL="228600" indent="-228600">
+            <a:endParaRPr lang="en-US" sz="2000" dirty="0"/>
+          </a:p>
+          <a:p>
+            <a:pPr marL="304800" indent="-304800">
               <a:spcAft>
-                <a:spcPts val="600"/>
+                <a:spcPts val="800"/>
               </a:spcAft>
               <a:buSzPct val="100000"/>
               <a:buChar char="•"/>
             </a:pPr>
             <a:r>
-              <a:rPr lang="en-US" sz="1700" dirty="0">
+              <a:rPr lang="en-US" sz="2000" dirty="0">
                 <a:solidFill>
                   <a:srgbClr val="141B26"/>
                 </a:solidFill>
               </a:rPr>
               <a:t>If most people in a community are vaccinated, the pathogen cannot spread, which also protects people who cannot be vaccinated.</a:t>
             </a:r>
-            <a:endParaRPr lang="en-US" sz="1700" dirty="0"/>
-          </a:p>
-          <a:p>
-            <a:pPr marL="228600" indent="-228600">
+            <a:endParaRPr lang="en-US" sz="2000" dirty="0"/>
+          </a:p>
+          <a:p>
+            <a:pPr marL="304800" indent="-304800">
               <a:spcAft>
-                <a:spcPts val="600"/>
+                <a:spcPts val="800"/>
               </a:spcAft>
               <a:buSzPct val="100000"/>
               <a:buChar char="•"/>
             </a:pPr>
             <a:r>
-              <a:rPr lang="en-US" sz="1700" dirty="0">
+              <a:rPr lang="en-US" sz="2000" dirty="0">
                 <a:solidFill>
                   <a:srgbClr val="141B26"/>
                 </a:solidFill>
               </a:rPr>
               <a:t>Viruses are not living: they can only copy themselves inside a cell.</a:t>
             </a:r>
-            <a:endParaRPr lang="en-US" sz="1700" dirty="0"/>
+            <a:endParaRPr lang="en-US" sz="2000" dirty="0"/>
           </a:p>
         </p:txBody>
       </p:sp>
@@ -7469,7 +7364,7 @@
         <p:spPr>
           <a:xfrm>
             <a:off x="6583680" y="4983480"/>
-            <a:ext cx="5029200" cy="502920"/>
+            <a:ext cx="5029200" cy="548640"/>
           </a:xfrm>
           <a:prstGeom prst="rect">
             <a:avLst/>
@@ -7485,7 +7380,7 @@
               <a:buNone/>
             </a:pPr>
             <a:r>
-              <a:rPr lang="en-US" sz="1100" dirty="0">
+              <a:rPr lang="en-US" sz="1300" dirty="0">
                 <a:solidFill>
                   <a:srgbClr val="141B26"/>
                 </a:solidFill>
@@ -7495,21 +7390,21 @@
             <a:pPr algn="l" indent="0" marL="0">
               <a:buNone/>
             </a:pPr>
-            <a:endParaRPr lang="en-US" sz="1100" dirty="0"/>
+            <a:endParaRPr lang="en-US" sz="1300" dirty="0"/>
           </a:p>
           <a:p>
             <a:pPr algn="l" indent="0" marL="0">
               <a:buNone/>
             </a:pPr>
             <a:r>
-              <a:rPr lang="en-US" sz="800" dirty="0">
+              <a:rPr lang="en-US" sz="900" dirty="0">
                 <a:solidFill>
                   <a:srgbClr val="5B6574"/>
                 </a:solidFill>
               </a:rPr>
               <a:t>Image: SELF Magazine, CC BY 2.0, via Wikimedia Commons</a:t>
             </a:r>
-            <a:endParaRPr lang="en-US" sz="1100" dirty="0"/>
+            <a:endParaRPr lang="en-US" sz="1300" dirty="0"/>
           </a:p>
         </p:txBody>
       </p:sp>
@@ -7556,16 +7451,14 @@
           <a:ln/>
         </p:spPr>
         <p:txBody>
-          <a:bodyPr wrap="square" lIns="0" tIns="0" rIns="0" bIns="0" rtlCol="0" anchor="ctr">
-            <a:normAutofit/>
-          </a:bodyPr>
+          <a:bodyPr wrap="square" lIns="0" tIns="0" rIns="0" bIns="0" rtlCol="0" anchor="ctr"/>
           <a:lstStyle/>
           <a:p>
             <a:pPr indent="0" marL="0">
               <a:buNone/>
             </a:pPr>
             <a:r>
-              <a:rPr lang="en-US" sz="1400" b="1" dirty="0">
+              <a:rPr lang="en-US" sz="1700" b="1" dirty="0">
                 <a:solidFill>
                   <a:srgbClr val="7B3A8E"/>
                 </a:solidFill>
@@ -7576,14 +7469,14 @@
               <a:buNone/>
             </a:pPr>
             <a:r>
-              <a:rPr lang="en-US" sz="1400" dirty="0">
+              <a:rPr lang="en-US" sz="1700" dirty="0">
                 <a:solidFill>
                   <a:srgbClr val="141B26"/>
                 </a:solidFill>
               </a:rPr>
               <a:t>Vaccination makes you immune without being ill.</a:t>
             </a:r>
-            <a:endParaRPr lang="en-US" sz="1400" dirty="0"/>
+            <a:endParaRPr lang="en-US" sz="1700" dirty="0"/>
           </a:p>
         </p:txBody>
       </p:sp>
@@ -7783,14 +7676,14 @@
               <a:buNone/>
             </a:pPr>
             <a:r>
-              <a:rPr lang="en-US" sz="1400" i="1" dirty="0">
+              <a:rPr lang="en-US" sz="1600" i="1" dirty="0">
                 <a:solidFill>
                   <a:srgbClr val="5B6574"/>
                 </a:solidFill>
               </a:rPr>
               <a:t>Mini whiteboards. One answer each, then we check.</a:t>
             </a:r>
-            <a:endParaRPr lang="en-US" sz="1400" dirty="0"/>
+            <a:endParaRPr lang="en-US" sz="1600" dirty="0"/>
           </a:p>
         </p:txBody>
       </p:sp>
@@ -7839,16 +7732,14 @@
           <a:ln/>
         </p:spPr>
         <p:txBody>
-          <a:bodyPr wrap="square" lIns="0" tIns="0" rIns="0" bIns="0" rtlCol="0" anchor="ctr">
-            <a:normAutofit/>
-          </a:bodyPr>
+          <a:bodyPr wrap="square" lIns="0" tIns="0" rIns="0" bIns="0" rtlCol="0" anchor="ctr"/>
           <a:lstStyle/>
           <a:p>
             <a:pPr indent="0" marL="0">
               <a:buNone/>
             </a:pPr>
             <a:r>
-              <a:rPr lang="en-US" sz="1600" b="1" dirty="0">
+              <a:rPr lang="en-US" sz="2000" b="1" dirty="0">
                 <a:solidFill>
                   <a:srgbClr val="7B3A8E"/>
                 </a:solidFill>
@@ -7859,14 +7750,14 @@
               <a:buNone/>
             </a:pPr>
             <a:r>
-              <a:rPr lang="en-US" sz="1600" dirty="0">
+              <a:rPr lang="en-US" sz="2000" dirty="0">
                 <a:solidFill>
                   <a:srgbClr val="141B26"/>
                 </a:solidFill>
               </a:rPr>
               <a:t>Which type of white blood cell ingests (eats) microorganisms?</a:t>
             </a:r>
-            <a:endParaRPr lang="en-US" sz="1600" dirty="0"/>
+            <a:endParaRPr lang="en-US" sz="2000" dirty="0"/>
           </a:p>
         </p:txBody>
       </p:sp>
@@ -7915,16 +7806,14 @@
           <a:ln/>
         </p:spPr>
         <p:txBody>
-          <a:bodyPr wrap="square" lIns="0" tIns="0" rIns="0" bIns="0" rtlCol="0" anchor="ctr">
-            <a:normAutofit/>
-          </a:bodyPr>
+          <a:bodyPr wrap="square" lIns="0" tIns="0" rIns="0" bIns="0" rtlCol="0" anchor="ctr"/>
           <a:lstStyle/>
           <a:p>
             <a:pPr indent="0" marL="0">
               <a:buNone/>
             </a:pPr>
             <a:r>
-              <a:rPr lang="en-US" sz="1600" b="1" dirty="0">
+              <a:rPr lang="en-US" sz="2000" b="1" dirty="0">
                 <a:solidFill>
                   <a:srgbClr val="7B3A8E"/>
                 </a:solidFill>
@@ -7935,14 +7824,14 @@
               <a:buNone/>
             </a:pPr>
             <a:r>
-              <a:rPr lang="en-US" sz="1600" dirty="0">
+              <a:rPr lang="en-US" sz="2000" dirty="0">
                 <a:solidFill>
                   <a:srgbClr val="141B26"/>
                 </a:solidFill>
               </a:rPr>
               <a:t>What do lymphocytes make?</a:t>
             </a:r>
-            <a:endParaRPr lang="en-US" sz="1600" dirty="0"/>
+            <a:endParaRPr lang="en-US" sz="2000" dirty="0"/>
           </a:p>
         </p:txBody>
       </p:sp>
@@ -7991,16 +7880,14 @@
           <a:ln/>
         </p:spPr>
         <p:txBody>
-          <a:bodyPr wrap="square" lIns="0" tIns="0" rIns="0" bIns="0" rtlCol="0" anchor="ctr">
-            <a:normAutofit/>
-          </a:bodyPr>
+          <a:bodyPr wrap="square" lIns="0" tIns="0" rIns="0" bIns="0" rtlCol="0" anchor="ctr"/>
           <a:lstStyle/>
           <a:p>
             <a:pPr indent="0" marL="0">
               <a:buNone/>
             </a:pPr>
             <a:r>
-              <a:rPr lang="en-US" sz="1600" b="1" dirty="0">
+              <a:rPr lang="en-US" sz="2000" b="1" dirty="0">
                 <a:solidFill>
                   <a:srgbClr val="7B3A8E"/>
                 </a:solidFill>
@@ -8011,14 +7898,14 @@
               <a:buNone/>
             </a:pPr>
             <a:r>
-              <a:rPr lang="en-US" sz="1600" dirty="0">
+              <a:rPr lang="en-US" sz="2000" dirty="0">
                 <a:solidFill>
                   <a:srgbClr val="141B26"/>
                 </a:solidFill>
               </a:rPr>
               <a:t>Why do you only get measles once?</a:t>
             </a:r>
-            <a:endParaRPr lang="en-US" sz="1600" dirty="0"/>
+            <a:endParaRPr lang="en-US" sz="2000" dirty="0"/>
           </a:p>
         </p:txBody>
       </p:sp>
@@ -8067,16 +7954,14 @@
           <a:ln/>
         </p:spPr>
         <p:txBody>
-          <a:bodyPr wrap="square" lIns="0" tIns="0" rIns="0" bIns="0" rtlCol="0" anchor="ctr">
-            <a:normAutofit/>
-          </a:bodyPr>
+          <a:bodyPr wrap="square" lIns="0" tIns="0" rIns="0" bIns="0" rtlCol="0" anchor="ctr"/>
           <a:lstStyle/>
           <a:p>
             <a:pPr indent="0" marL="0">
               <a:buNone/>
             </a:pPr>
             <a:r>
-              <a:rPr lang="en-US" sz="1600" b="1" dirty="0">
+              <a:rPr lang="en-US" sz="2000" b="1" dirty="0">
                 <a:solidFill>
                   <a:srgbClr val="7B3A8E"/>
                 </a:solidFill>
@@ -8087,14 +7972,14 @@
               <a:buNone/>
             </a:pPr>
             <a:r>
-              <a:rPr lang="en-US" sz="1600" dirty="0">
+              <a:rPr lang="en-US" sz="2000" dirty="0">
                 <a:solidFill>
                   <a:srgbClr val="141B26"/>
                 </a:solidFill>
               </a:rPr>
               <a:t>Does a measles vaccine protect you against chickenpox? Yes or no, and why.</a:t>
             </a:r>
-            <a:endParaRPr lang="en-US" sz="1600" dirty="0"/>
+            <a:endParaRPr lang="en-US" sz="2000" dirty="0"/>
           </a:p>
         </p:txBody>
       </p:sp>
@@ -8143,16 +8028,14 @@
           <a:ln/>
         </p:spPr>
         <p:txBody>
-          <a:bodyPr wrap="square" lIns="0" tIns="0" rIns="0" bIns="0" rtlCol="0" anchor="ctr">
-            <a:normAutofit/>
-          </a:bodyPr>
+          <a:bodyPr wrap="square" lIns="0" tIns="0" rIns="0" bIns="0" rtlCol="0" anchor="ctr"/>
           <a:lstStyle/>
           <a:p>
             <a:pPr indent="0" marL="0">
               <a:buNone/>
             </a:pPr>
             <a:r>
-              <a:rPr lang="en-US" sz="1600" b="1" dirty="0">
+              <a:rPr lang="en-US" sz="2000" b="1" dirty="0">
                 <a:solidFill>
                   <a:srgbClr val="7B3A8E"/>
                 </a:solidFill>
@@ -8163,14 +8046,14 @@
               <a:buNone/>
             </a:pPr>
             <a:r>
-              <a:rPr lang="en-US" sz="1600" dirty="0">
+              <a:rPr lang="en-US" sz="2000" dirty="0">
                 <a:solidFill>
                   <a:srgbClr val="141B26"/>
                 </a:solidFill>
               </a:rPr>
               <a:t>What does a vaccine contain?</a:t>
             </a:r>
-            <a:endParaRPr lang="en-US" sz="1600" dirty="0"/>
+            <a:endParaRPr lang="en-US" sz="2000" dirty="0"/>
           </a:p>
         </p:txBody>
       </p:sp>
